--- a/Term_Project/HW Data.pptx
+++ b/Term_Project/HW Data.pptx
@@ -2429,13 +2429,49 @@
               </a:lnSpc>
             </a:pPr>
             <a:r>
+              <a:rPr lang="ko-KR" altLang="en-US" sz="1600" b="1" i="0" u="none" dirty="0">
+                <a:solidFill>
+                  <a:srgbClr val="0F172A"/>
+                </a:solidFill>
+                <a:latin typeface="Pretendard"/>
+              </a:rPr>
+              <a:t>센서 융합 </a:t>
+            </a:r>
+            <a:r>
+              <a:rPr lang="en-US" altLang="ko-KR" sz="1600" b="1" i="0" u="none" dirty="0">
+                <a:solidFill>
+                  <a:srgbClr val="0F172A"/>
+                </a:solidFill>
+                <a:latin typeface="Pretendard"/>
+              </a:rPr>
+              <a:t>(</a:t>
+            </a:r>
+            <a:r>
               <a:rPr sz="1600" b="1" i="0" u="none" dirty="0">
                 <a:solidFill>
                   <a:srgbClr val="0F172A"/>
                 </a:solidFill>
                 <a:latin typeface="Pretendard"/>
               </a:rPr>
-              <a:t>RGB + Thermal Fusion:</a:t>
+              <a:t>RGB + Thermal Fusion</a:t>
+            </a:r>
+            <a:r>
+              <a:rPr lang="en-US" altLang="ko-KR" sz="1600" b="1" i="0" u="none" dirty="0">
+                <a:solidFill>
+                  <a:srgbClr val="0F172A"/>
+                </a:solidFill>
+                <a:latin typeface="Pretendard"/>
+              </a:rPr>
+              <a:t>)</a:t>
+            </a:r>
+            <a:r>
+              <a:rPr sz="1600" b="1" i="0" u="none" dirty="0">
+                <a:solidFill>
+                  <a:srgbClr val="0F172A"/>
+                </a:solidFill>
+                <a:latin typeface="Pretendard"/>
+              </a:rPr>
+              <a:t>:</a:t>
             </a:r>
             <a:r>
               <a:rPr sz="1600" b="0" i="0" u="none" dirty="0">
@@ -2558,7 +2594,7 @@
           </a:bodyPr>
           <a:lstStyle/>
           <a:p>
-            <a:pPr algn="l"/>
+            <a:pPr algn="l" rtl="0"/>
             <a:r>
               <a:rPr sz="2000" b="1" i="0" u="none" dirty="0">
                 <a:solidFill>
@@ -2566,7 +2602,11 @@
                 </a:solidFill>
                 <a:latin typeface="Pretendard"/>
               </a:rPr>
-              <a:t>1. Vision &amp; Sensor Fusion</a:t>
+              <a:t>1. </a:t>
+            </a:r>
+            <a:r>
+              <a:rPr lang="ko-Kore-KR" altLang="ko-Kore-KR" sz="1800" b="1" dirty="0"/>
+              <a:t>비전 및 센서 융합 인식 모듈</a:t>
             </a:r>
           </a:p>
         </p:txBody>
@@ -2728,7 +2768,7 @@
         </p:blipFill>
         <p:spPr>
           <a:xfrm>
-            <a:off x="5474044" y="3075984"/>
+            <a:off x="6546930" y="3103722"/>
             <a:ext cx="1799882" cy="272251"/>
           </a:xfrm>
           <a:prstGeom prst="rect">
@@ -3475,7 +3515,7 @@
           </a:bodyPr>
           <a:lstStyle/>
           <a:p>
-            <a:pPr algn="l"/>
+            <a:pPr algn="l" rtl="0"/>
             <a:r>
               <a:rPr sz="2000" b="1" i="0" u="none" dirty="0">
                 <a:solidFill>
@@ -3483,7 +3523,11 @@
                 </a:solidFill>
                 <a:latin typeface="Pretendard"/>
               </a:rPr>
-              <a:t>2. Spatial AI &amp; SLAM Engine</a:t>
+              <a:t>2. </a:t>
+            </a:r>
+            <a:r>
+              <a:rPr lang="ko-Kore-KR" altLang="ko-Kore-KR" sz="1800" b="1" dirty="0"/>
+              <a:t>지능형 자율비행 및 위치 추정 모듈</a:t>
             </a:r>
           </a:p>
         </p:txBody>
@@ -3645,7 +3689,7 @@
         </p:blipFill>
         <p:spPr>
           <a:xfrm>
-            <a:off x="13563527" y="3047259"/>
+            <a:off x="13531976" y="3047259"/>
             <a:ext cx="2178008" cy="272251"/>
           </a:xfrm>
           <a:prstGeom prst="rect">
@@ -4368,7 +4412,7 @@
           </a:bodyPr>
           <a:lstStyle/>
           <a:p>
-            <a:pPr algn="l"/>
+            <a:pPr algn="l" rtl="0"/>
             <a:r>
               <a:rPr sz="2000" b="1" i="0" u="none" dirty="0">
                 <a:solidFill>
@@ -4376,7 +4420,11 @@
                 </a:solidFill>
                 <a:latin typeface="Pretendard"/>
               </a:rPr>
-              <a:t>3. Context Reasoning &amp; Anomaly</a:t>
+              <a:t>3. </a:t>
+            </a:r>
+            <a:r>
+              <a:rPr lang="ko-Kore-KR" altLang="ko-Kore-KR" sz="1800" b="1" dirty="0"/>
+              <a:t>상황 판단 및 위협 추론 모듈</a:t>
             </a:r>
           </a:p>
         </p:txBody>
@@ -4538,7 +4586,7 @@
         </p:blipFill>
         <p:spPr>
           <a:xfrm>
-            <a:off x="5133730" y="6982041"/>
+            <a:off x="4976168" y="6982041"/>
             <a:ext cx="2480509" cy="272251"/>
           </a:xfrm>
           <a:prstGeom prst="rect">
@@ -5284,7 +5332,7 @@
         <p:spPr>
           <a:xfrm>
             <a:off x="9913810" y="5492027"/>
-            <a:ext cx="4150940" cy="309295"/>
+            <a:ext cx="4150940" cy="307777"/>
           </a:xfrm>
           <a:prstGeom prst="rect">
             <a:avLst/>
@@ -5297,7 +5345,7 @@
           </a:bodyPr>
           <a:lstStyle/>
           <a:p>
-            <a:pPr algn="l"/>
+            <a:pPr algn="l" rtl="0"/>
             <a:r>
               <a:rPr sz="2000" b="1" i="0" u="none" dirty="0">
                 <a:solidFill>
@@ -5308,22 +5356,8 @@
               <a:t>4. Edge-Cloud </a:t>
             </a:r>
             <a:r>
-              <a:rPr sz="2000" b="1" i="0" u="none" dirty="0" err="1">
-                <a:solidFill>
-                  <a:srgbClr val="0F172A"/>
-                </a:solidFill>
-                <a:latin typeface="Pretendard"/>
-              </a:rPr>
-              <a:t>MLOps</a:t>
-            </a:r>
-            <a:r>
-              <a:rPr sz="2000" b="1" i="0" u="none" dirty="0">
-                <a:solidFill>
-                  <a:srgbClr val="0F172A"/>
-                </a:solidFill>
-                <a:latin typeface="Pretendard"/>
-              </a:rPr>
-              <a:t> Pipeline</a:t>
+              <a:rPr lang="ko-Kore-KR" altLang="ko-Kore-KR" sz="1800" b="1" dirty="0"/>
+              <a:t>AI 파이프라인 및 MLOps</a:t>
             </a:r>
           </a:p>
         </p:txBody>
@@ -8752,7 +8786,7 @@
         <p:spPr>
           <a:xfrm>
             <a:off x="690561" y="3798942"/>
-            <a:ext cx="187905" cy="181193"/>
+            <a:ext cx="376238" cy="362799"/>
           </a:xfrm>
           <a:prstGeom prst="rect">
             <a:avLst/>
@@ -8782,7 +8816,7 @@
         <p:spPr>
           <a:xfrm>
             <a:off x="690561" y="8344509"/>
-            <a:ext cx="161061" cy="181193"/>
+            <a:ext cx="322489" cy="362799"/>
           </a:xfrm>
           <a:prstGeom prst="rect">
             <a:avLst/>
@@ -8812,7 +8846,7 @@
         <p:spPr>
           <a:xfrm>
             <a:off x="623452" y="6749371"/>
-            <a:ext cx="228170" cy="181193"/>
+            <a:ext cx="456860" cy="362799"/>
           </a:xfrm>
           <a:prstGeom prst="rect">
             <a:avLst/>
@@ -8842,7 +8876,7 @@
         <p:spPr>
           <a:xfrm>
             <a:off x="690562" y="2311261"/>
-            <a:ext cx="187905" cy="181193"/>
+            <a:ext cx="376238" cy="362799"/>
           </a:xfrm>
           <a:prstGeom prst="rect">
             <a:avLst/>
@@ -8872,7 +8906,7 @@
         <p:spPr>
           <a:xfrm>
             <a:off x="690562" y="5279012"/>
-            <a:ext cx="187905" cy="181193"/>
+            <a:ext cx="376238" cy="362799"/>
           </a:xfrm>
           <a:prstGeom prst="rect">
             <a:avLst/>
